--- a/w6/c6/Mobile-and-Embedded-Lecture6.pptx
+++ b/w6/c6/Mobile-and-Embedded-Lecture6.pptx
@@ -26,15 +26,15 @@
     <p:sldId id="272" r:id="rId17"/>
     <p:sldId id="273" r:id="rId18"/>
     <p:sldId id="274" r:id="rId19"/>
-    <p:sldId id="276" r:id="rId20"/>
-    <p:sldId id="280" r:id="rId21"/>
-    <p:sldId id="279" r:id="rId22"/>
-    <p:sldId id="277" r:id="rId23"/>
-    <p:sldId id="278" r:id="rId24"/>
-    <p:sldId id="281" r:id="rId25"/>
-    <p:sldId id="282" r:id="rId26"/>
-    <p:sldId id="283" r:id="rId27"/>
-    <p:sldId id="275" r:id="rId28"/>
+    <p:sldId id="275" r:id="rId20"/>
+    <p:sldId id="276" r:id="rId21"/>
+    <p:sldId id="280" r:id="rId22"/>
+    <p:sldId id="279" r:id="rId23"/>
+    <p:sldId id="277" r:id="rId24"/>
+    <p:sldId id="278" r:id="rId25"/>
+    <p:sldId id="281" r:id="rId26"/>
+    <p:sldId id="282" r:id="rId27"/>
+    <p:sldId id="283" r:id="rId28"/>
   </p:sldIdLst>
   <p:sldSz cx="12192000" cy="6858000"/>
   <p:notesSz cx="6858000" cy="9144000"/>
@@ -1439,13 +1439,7 @@
   <p:cSld>
     <p:spTree>
       <p:nvGrpSpPr>
-        <p:cNvPr id="1" name="Shape 305">
-          <a:extLst>
-            <a:ext uri="{FF2B5EF4-FFF2-40B4-BE49-F238E27FC236}">
-              <a16:creationId xmlns:a16="http://schemas.microsoft.com/office/drawing/2014/main" id="{0371143B-AF2A-7623-D854-12A3B2D62EF1}"/>
-            </a:ext>
-          </a:extLst>
-        </p:cNvPr>
+        <p:cNvPr id="1" name="Shape 313"/>
         <p:cNvGrpSpPr/>
         <p:nvPr/>
       </p:nvGrpSpPr>
@@ -1459,13 +1453,7 @@
       </p:grpSpPr>
       <p:sp>
         <p:nvSpPr>
-          <p:cNvPr id="306" name="Google Shape;306;p18:notes">
-            <a:extLst>
-              <a:ext uri="{FF2B5EF4-FFF2-40B4-BE49-F238E27FC236}">
-                <a16:creationId xmlns:a16="http://schemas.microsoft.com/office/drawing/2014/main" id="{7066D226-24B7-BC71-4361-98BBF6A7F94B}"/>
-              </a:ext>
-            </a:extLst>
-          </p:cNvPr>
+          <p:cNvPr id="314" name="Google Shape;314;p19:notes"/>
           <p:cNvSpPr txBox="1">
             <a:spLocks noGrp="1"/>
           </p:cNvSpPr>
@@ -1503,13 +1491,7 @@
       </p:sp>
       <p:sp>
         <p:nvSpPr>
-          <p:cNvPr id="307" name="Google Shape;307;p18:notes">
-            <a:extLst>
-              <a:ext uri="{FF2B5EF4-FFF2-40B4-BE49-F238E27FC236}">
-                <a16:creationId xmlns:a16="http://schemas.microsoft.com/office/drawing/2014/main" id="{403AA4E9-1C75-7F56-9E19-2D69013E246F}"/>
-              </a:ext>
-            </a:extLst>
-          </p:cNvPr>
+          <p:cNvPr id="315" name="Google Shape;315;p19:notes"/>
           <p:cNvSpPr>
             <a:spLocks noGrp="1" noRot="1" noChangeAspect="1"/>
           </p:cNvSpPr>
@@ -1549,11 +1531,6 @@
         </p:spPr>
       </p:sp>
     </p:spTree>
-    <p:extLst>
-      <p:ext uri="{BB962C8B-B14F-4D97-AF65-F5344CB8AC3E}">
-        <p14:creationId xmlns:p14="http://schemas.microsoft.com/office/powerpoint/2010/main" val="835208491"/>
-      </p:ext>
-    </p:extLst>
   </p:cSld>
   <p:clrMapOvr>
     <a:masterClrMapping/>
@@ -1569,7 +1546,7 @@
         <p:cNvPr id="1" name="Shape 305">
           <a:extLst>
             <a:ext uri="{FF2B5EF4-FFF2-40B4-BE49-F238E27FC236}">
-              <a16:creationId xmlns:a16="http://schemas.microsoft.com/office/drawing/2014/main" id="{2DDAC597-D030-64A6-0A47-EEC63BD82124}"/>
+              <a16:creationId xmlns:a16="http://schemas.microsoft.com/office/drawing/2014/main" id="{0371143B-AF2A-7623-D854-12A3B2D62EF1}"/>
             </a:ext>
           </a:extLst>
         </p:cNvPr>
@@ -1589,7 +1566,7 @@
           <p:cNvPr id="306" name="Google Shape;306;p18:notes">
             <a:extLst>
               <a:ext uri="{FF2B5EF4-FFF2-40B4-BE49-F238E27FC236}">
-                <a16:creationId xmlns:a16="http://schemas.microsoft.com/office/drawing/2014/main" id="{B8CD389D-46FB-289A-EB11-D511F08FA752}"/>
+                <a16:creationId xmlns:a16="http://schemas.microsoft.com/office/drawing/2014/main" id="{7066D226-24B7-BC71-4361-98BBF6A7F94B}"/>
               </a:ext>
             </a:extLst>
           </p:cNvPr>
@@ -1633,7 +1610,7 @@
           <p:cNvPr id="307" name="Google Shape;307;p18:notes">
             <a:extLst>
               <a:ext uri="{FF2B5EF4-FFF2-40B4-BE49-F238E27FC236}">
-                <a16:creationId xmlns:a16="http://schemas.microsoft.com/office/drawing/2014/main" id="{C28CD24A-0F38-538A-3578-96EA050277E5}"/>
+                <a16:creationId xmlns:a16="http://schemas.microsoft.com/office/drawing/2014/main" id="{403AA4E9-1C75-7F56-9E19-2D69013E246F}"/>
               </a:ext>
             </a:extLst>
           </p:cNvPr>
@@ -1678,7 +1655,7 @@
     </p:spTree>
     <p:extLst>
       <p:ext uri="{BB962C8B-B14F-4D97-AF65-F5344CB8AC3E}">
-        <p14:creationId xmlns:p14="http://schemas.microsoft.com/office/powerpoint/2010/main" val="1122337664"/>
+        <p14:creationId xmlns:p14="http://schemas.microsoft.com/office/powerpoint/2010/main" val="835208491"/>
       </p:ext>
     </p:extLst>
   </p:cSld>
@@ -1800,7 +1777,7 @@
         <p:cNvPr id="1" name="Shape 305">
           <a:extLst>
             <a:ext uri="{FF2B5EF4-FFF2-40B4-BE49-F238E27FC236}">
-              <a16:creationId xmlns:a16="http://schemas.microsoft.com/office/drawing/2014/main" id="{D68AFBC3-E639-97FD-9C1B-14A0F68AAFDA}"/>
+              <a16:creationId xmlns:a16="http://schemas.microsoft.com/office/drawing/2014/main" id="{2DDAC597-D030-64A6-0A47-EEC63BD82124}"/>
             </a:ext>
           </a:extLst>
         </p:cNvPr>
@@ -1820,7 +1797,7 @@
           <p:cNvPr id="306" name="Google Shape;306;p18:notes">
             <a:extLst>
               <a:ext uri="{FF2B5EF4-FFF2-40B4-BE49-F238E27FC236}">
-                <a16:creationId xmlns:a16="http://schemas.microsoft.com/office/drawing/2014/main" id="{BDCE861F-EC38-5E0C-D96D-9BAD179331E4}"/>
+                <a16:creationId xmlns:a16="http://schemas.microsoft.com/office/drawing/2014/main" id="{B8CD389D-46FB-289A-EB11-D511F08FA752}"/>
               </a:ext>
             </a:extLst>
           </p:cNvPr>
@@ -1864,7 +1841,7 @@
           <p:cNvPr id="307" name="Google Shape;307;p18:notes">
             <a:extLst>
               <a:ext uri="{FF2B5EF4-FFF2-40B4-BE49-F238E27FC236}">
-                <a16:creationId xmlns:a16="http://schemas.microsoft.com/office/drawing/2014/main" id="{8242B0FD-DDEF-5637-2AFD-BE0B62EB8A89}"/>
+                <a16:creationId xmlns:a16="http://schemas.microsoft.com/office/drawing/2014/main" id="{C28CD24A-0F38-538A-3578-96EA050277E5}"/>
               </a:ext>
             </a:extLst>
           </p:cNvPr>
@@ -1909,6 +1886,133 @@
     </p:spTree>
     <p:extLst>
       <p:ext uri="{BB962C8B-B14F-4D97-AF65-F5344CB8AC3E}">
+        <p14:creationId xmlns:p14="http://schemas.microsoft.com/office/powerpoint/2010/main" val="1122337664"/>
+      </p:ext>
+    </p:extLst>
+  </p:cSld>
+  <p:clrMapOvr>
+    <a:masterClrMapping/>
+  </p:clrMapOvr>
+</p:notes>
+</file>
+
+<file path=ppt/notesSlides/notesSlide21.xml><?xml version="1.0" encoding="utf-8"?>
+<p:notes xmlns:a="http://schemas.openxmlformats.org/drawingml/2006/main" xmlns:r="http://schemas.openxmlformats.org/officeDocument/2006/relationships" xmlns:p="http://schemas.openxmlformats.org/presentationml/2006/main" showMasterSp="0" showMasterPhAnim="0">
+  <p:cSld>
+    <p:spTree>
+      <p:nvGrpSpPr>
+        <p:cNvPr id="1" name="Shape 305">
+          <a:extLst>
+            <a:ext uri="{FF2B5EF4-FFF2-40B4-BE49-F238E27FC236}">
+              <a16:creationId xmlns:a16="http://schemas.microsoft.com/office/drawing/2014/main" id="{D68AFBC3-E639-97FD-9C1B-14A0F68AAFDA}"/>
+            </a:ext>
+          </a:extLst>
+        </p:cNvPr>
+        <p:cNvGrpSpPr/>
+        <p:nvPr/>
+      </p:nvGrpSpPr>
+      <p:grpSpPr>
+        <a:xfrm>
+          <a:off x="0" y="0"/>
+          <a:ext cx="0" cy="0"/>
+          <a:chOff x="0" y="0"/>
+          <a:chExt cx="0" cy="0"/>
+        </a:xfrm>
+      </p:grpSpPr>
+      <p:sp>
+        <p:nvSpPr>
+          <p:cNvPr id="306" name="Google Shape;306;p18:notes">
+            <a:extLst>
+              <a:ext uri="{FF2B5EF4-FFF2-40B4-BE49-F238E27FC236}">
+                <a16:creationId xmlns:a16="http://schemas.microsoft.com/office/drawing/2014/main" id="{BDCE861F-EC38-5E0C-D96D-9BAD179331E4}"/>
+              </a:ext>
+            </a:extLst>
+          </p:cNvPr>
+          <p:cNvSpPr txBox="1">
+            <a:spLocks noGrp="1"/>
+          </p:cNvSpPr>
+          <p:nvPr>
+            <p:ph type="body" idx="1"/>
+          </p:nvPr>
+        </p:nvSpPr>
+        <p:spPr>
+          <a:xfrm>
+            <a:off x="685800" y="4343400"/>
+            <a:ext cx="5486400" cy="4114800"/>
+          </a:xfrm>
+          <a:prstGeom prst="rect">
+            <a:avLst/>
+          </a:prstGeom>
+        </p:spPr>
+        <p:txBody>
+          <a:bodyPr spcFirstLastPara="1" wrap="square" lIns="91425" tIns="91425" rIns="91425" bIns="91425" anchor="t" anchorCtr="0">
+            <a:noAutofit/>
+          </a:bodyPr>
+          <a:lstStyle/>
+          <a:p>
+            <a:pPr marL="0" lvl="0" indent="0" algn="l" rtl="0">
+              <a:spcBef>
+                <a:spcPts val="0"/>
+              </a:spcBef>
+              <a:spcAft>
+                <a:spcPts val="0"/>
+              </a:spcAft>
+              <a:buNone/>
+            </a:pPr>
+            <a:endParaRPr/>
+          </a:p>
+        </p:txBody>
+      </p:sp>
+      <p:sp>
+        <p:nvSpPr>
+          <p:cNvPr id="307" name="Google Shape;307;p18:notes">
+            <a:extLst>
+              <a:ext uri="{FF2B5EF4-FFF2-40B4-BE49-F238E27FC236}">
+                <a16:creationId xmlns:a16="http://schemas.microsoft.com/office/drawing/2014/main" id="{8242B0FD-DDEF-5637-2AFD-BE0B62EB8A89}"/>
+              </a:ext>
+            </a:extLst>
+          </p:cNvPr>
+          <p:cNvSpPr>
+            <a:spLocks noGrp="1" noRot="1" noChangeAspect="1"/>
+          </p:cNvSpPr>
+          <p:nvPr>
+            <p:ph type="sldImg" idx="2"/>
+          </p:nvPr>
+        </p:nvSpPr>
+        <p:spPr>
+          <a:xfrm>
+            <a:off x="381000" y="685800"/>
+            <a:ext cx="6096000" cy="3429000"/>
+          </a:xfrm>
+          <a:custGeom>
+            <a:avLst/>
+            <a:gdLst/>
+            <a:ahLst/>
+            <a:cxnLst/>
+            <a:rect l="l" t="t" r="r" b="b"/>
+            <a:pathLst>
+              <a:path w="120000" h="120000" extrusionOk="0">
+                <a:moveTo>
+                  <a:pt x="0" y="0"/>
+                </a:moveTo>
+                <a:lnTo>
+                  <a:pt x="120000" y="0"/>
+                </a:lnTo>
+                <a:lnTo>
+                  <a:pt x="120000" y="120000"/>
+                </a:lnTo>
+                <a:lnTo>
+                  <a:pt x="0" y="120000"/>
+                </a:lnTo>
+                <a:close/>
+              </a:path>
+            </a:pathLst>
+          </a:custGeom>
+        </p:spPr>
+      </p:sp>
+    </p:spTree>
+    <p:extLst>
+      <p:ext uri="{BB962C8B-B14F-4D97-AF65-F5344CB8AC3E}">
         <p14:creationId xmlns:p14="http://schemas.microsoft.com/office/powerpoint/2010/main" val="392730767"/>
       </p:ext>
     </p:extLst>
@@ -1919,7 +2023,7 @@
 </p:notes>
 </file>
 
-<file path=ppt/notesSlides/notesSlide21.xml><?xml version="1.0" encoding="utf-8"?>
+<file path=ppt/notesSlides/notesSlide22.xml><?xml version="1.0" encoding="utf-8"?>
 <p:notes xmlns:a="http://schemas.openxmlformats.org/drawingml/2006/main" xmlns:r="http://schemas.openxmlformats.org/officeDocument/2006/relationships" xmlns:p="http://schemas.openxmlformats.org/presentationml/2006/main" showMasterSp="0" showMasterPhAnim="0">
   <p:cSld>
     <p:spTree>
@@ -2046,7 +2150,7 @@
 </p:notes>
 </file>
 
-<file path=ppt/notesSlides/notesSlide22.xml><?xml version="1.0" encoding="utf-8"?>
+<file path=ppt/notesSlides/notesSlide23.xml><?xml version="1.0" encoding="utf-8"?>
 <p:notes xmlns:a="http://schemas.openxmlformats.org/drawingml/2006/main" xmlns:r="http://schemas.openxmlformats.org/officeDocument/2006/relationships" xmlns:p="http://schemas.openxmlformats.org/presentationml/2006/main" showMasterSp="0" showMasterPhAnim="0">
   <p:cSld>
     <p:spTree>
@@ -2173,7 +2277,7 @@
 </p:notes>
 </file>
 
-<file path=ppt/notesSlides/notesSlide23.xml><?xml version="1.0" encoding="utf-8"?>
+<file path=ppt/notesSlides/notesSlide24.xml><?xml version="1.0" encoding="utf-8"?>
 <p:notes xmlns:a="http://schemas.openxmlformats.org/drawingml/2006/main" xmlns:r="http://schemas.openxmlformats.org/officeDocument/2006/relationships" xmlns:p="http://schemas.openxmlformats.org/presentationml/2006/main" showMasterSp="0" showMasterPhAnim="0">
   <p:cSld>
     <p:spTree>
@@ -2300,7 +2404,7 @@
 </p:notes>
 </file>
 
-<file path=ppt/notesSlides/notesSlide24.xml><?xml version="1.0" encoding="utf-8"?>
+<file path=ppt/notesSlides/notesSlide25.xml><?xml version="1.0" encoding="utf-8"?>
 <p:notes xmlns:a="http://schemas.openxmlformats.org/drawingml/2006/main" xmlns:r="http://schemas.openxmlformats.org/officeDocument/2006/relationships" xmlns:p="http://schemas.openxmlformats.org/presentationml/2006/main" showMasterSp="0" showMasterPhAnim="0">
   <p:cSld>
     <p:spTree>
@@ -2427,7 +2531,7 @@
 </p:notes>
 </file>
 
-<file path=ppt/notesSlides/notesSlide25.xml><?xml version="1.0" encoding="utf-8"?>
+<file path=ppt/notesSlides/notesSlide26.xml><?xml version="1.0" encoding="utf-8"?>
 <p:notes xmlns:a="http://schemas.openxmlformats.org/drawingml/2006/main" xmlns:r="http://schemas.openxmlformats.org/officeDocument/2006/relationships" xmlns:p="http://schemas.openxmlformats.org/presentationml/2006/main" showMasterSp="0" showMasterPhAnim="0">
   <p:cSld>
     <p:spTree>
@@ -2547,110 +2651,6 @@
         <p14:creationId xmlns:p14="http://schemas.microsoft.com/office/powerpoint/2010/main" val="1651368512"/>
       </p:ext>
     </p:extLst>
-  </p:cSld>
-  <p:clrMapOvr>
-    <a:masterClrMapping/>
-  </p:clrMapOvr>
-</p:notes>
-</file>
-
-<file path=ppt/notesSlides/notesSlide26.xml><?xml version="1.0" encoding="utf-8"?>
-<p:notes xmlns:a="http://schemas.openxmlformats.org/drawingml/2006/main" xmlns:r="http://schemas.openxmlformats.org/officeDocument/2006/relationships" xmlns:p="http://schemas.openxmlformats.org/presentationml/2006/main" showMasterSp="0" showMasterPhAnim="0">
-  <p:cSld>
-    <p:spTree>
-      <p:nvGrpSpPr>
-        <p:cNvPr id="1" name="Shape 313"/>
-        <p:cNvGrpSpPr/>
-        <p:nvPr/>
-      </p:nvGrpSpPr>
-      <p:grpSpPr>
-        <a:xfrm>
-          <a:off x="0" y="0"/>
-          <a:ext cx="0" cy="0"/>
-          <a:chOff x="0" y="0"/>
-          <a:chExt cx="0" cy="0"/>
-        </a:xfrm>
-      </p:grpSpPr>
-      <p:sp>
-        <p:nvSpPr>
-          <p:cNvPr id="314" name="Google Shape;314;p19:notes"/>
-          <p:cNvSpPr txBox="1">
-            <a:spLocks noGrp="1"/>
-          </p:cNvSpPr>
-          <p:nvPr>
-            <p:ph type="body" idx="1"/>
-          </p:nvPr>
-        </p:nvSpPr>
-        <p:spPr>
-          <a:xfrm>
-            <a:off x="685800" y="4343400"/>
-            <a:ext cx="5486400" cy="4114800"/>
-          </a:xfrm>
-          <a:prstGeom prst="rect">
-            <a:avLst/>
-          </a:prstGeom>
-        </p:spPr>
-        <p:txBody>
-          <a:bodyPr spcFirstLastPara="1" wrap="square" lIns="91425" tIns="91425" rIns="91425" bIns="91425" anchor="t" anchorCtr="0">
-            <a:noAutofit/>
-          </a:bodyPr>
-          <a:lstStyle/>
-          <a:p>
-            <a:pPr marL="0" lvl="0" indent="0" algn="l" rtl="0">
-              <a:spcBef>
-                <a:spcPts val="0"/>
-              </a:spcBef>
-              <a:spcAft>
-                <a:spcPts val="0"/>
-              </a:spcAft>
-              <a:buNone/>
-            </a:pPr>
-            <a:endParaRPr/>
-          </a:p>
-        </p:txBody>
-      </p:sp>
-      <p:sp>
-        <p:nvSpPr>
-          <p:cNvPr id="315" name="Google Shape;315;p19:notes"/>
-          <p:cNvSpPr>
-            <a:spLocks noGrp="1" noRot="1" noChangeAspect="1"/>
-          </p:cNvSpPr>
-          <p:nvPr>
-            <p:ph type="sldImg" idx="2"/>
-          </p:nvPr>
-        </p:nvSpPr>
-        <p:spPr>
-          <a:xfrm>
-            <a:off x="381000" y="685800"/>
-            <a:ext cx="6096000" cy="3429000"/>
-          </a:xfrm>
-          <a:custGeom>
-            <a:avLst/>
-            <a:gdLst/>
-            <a:ahLst/>
-            <a:cxnLst/>
-            <a:rect l="l" t="t" r="r" b="b"/>
-            <a:pathLst>
-              <a:path w="120000" h="120000" extrusionOk="0">
-                <a:moveTo>
-                  <a:pt x="0" y="0"/>
-                </a:moveTo>
-                <a:lnTo>
-                  <a:pt x="120000" y="0"/>
-                </a:lnTo>
-                <a:lnTo>
-                  <a:pt x="120000" y="120000"/>
-                </a:lnTo>
-                <a:lnTo>
-                  <a:pt x="0" y="120000"/>
-                </a:lnTo>
-                <a:close/>
-              </a:path>
-            </a:pathLst>
-          </a:custGeom>
-        </p:spPr>
-      </p:sp>
-    </p:spTree>
   </p:cSld>
   <p:clrMapOvr>
     <a:masterClrMapping/>
@@ -10054,6 +10054,806 @@
 <file path=ppt/slides/slide19.xml><?xml version="1.0" encoding="utf-8"?>
 <p:sld xmlns:a="http://schemas.openxmlformats.org/drawingml/2006/main" xmlns:r="http://schemas.openxmlformats.org/officeDocument/2006/relationships" xmlns:p="http://schemas.openxmlformats.org/presentationml/2006/main">
   <p:cSld>
+    <p:spTree>
+      <p:nvGrpSpPr>
+        <p:cNvPr id="1" name="Shape 316"/>
+        <p:cNvGrpSpPr/>
+        <p:nvPr/>
+      </p:nvGrpSpPr>
+      <p:grpSpPr>
+        <a:xfrm>
+          <a:off x="0" y="0"/>
+          <a:ext cx="0" cy="0"/>
+          <a:chOff x="0" y="0"/>
+          <a:chExt cx="0" cy="0"/>
+        </a:xfrm>
+      </p:grpSpPr>
+      <p:pic>
+        <p:nvPicPr>
+          <p:cNvPr id="317" name="Google Shape;317;p31" descr="image.png"/>
+          <p:cNvPicPr preferRelativeResize="0"/>
+          <p:nvPr/>
+        </p:nvPicPr>
+        <p:blipFill rotWithShape="1">
+          <a:blip r:embed="rId3">
+            <a:alphaModFix/>
+          </a:blip>
+          <a:srcRect/>
+          <a:stretch/>
+        </p:blipFill>
+        <p:spPr>
+          <a:xfrm>
+            <a:off x="0" y="0"/>
+            <a:ext cx="12192000" cy="6858000"/>
+          </a:xfrm>
+          <a:prstGeom prst="rect">
+            <a:avLst/>
+          </a:prstGeom>
+          <a:noFill/>
+          <a:ln>
+            <a:noFill/>
+          </a:ln>
+        </p:spPr>
+      </p:pic>
+      <p:pic>
+        <p:nvPicPr>
+          <p:cNvPr id="318" name="Google Shape;318;p31" descr="image.png"/>
+          <p:cNvPicPr preferRelativeResize="0"/>
+          <p:nvPr/>
+        </p:nvPicPr>
+        <p:blipFill rotWithShape="1">
+          <a:blip r:embed="rId4">
+            <a:alphaModFix/>
+          </a:blip>
+          <a:srcRect/>
+          <a:stretch/>
+        </p:blipFill>
+        <p:spPr>
+          <a:xfrm>
+            <a:off x="571500" y="2395537"/>
+            <a:ext cx="3429000" cy="3019425"/>
+          </a:xfrm>
+          <a:prstGeom prst="rect">
+            <a:avLst/>
+          </a:prstGeom>
+          <a:noFill/>
+          <a:ln>
+            <a:noFill/>
+          </a:ln>
+        </p:spPr>
+      </p:pic>
+      <p:pic>
+        <p:nvPicPr>
+          <p:cNvPr id="319" name="Google Shape;319;p31" descr="image.png"/>
+          <p:cNvPicPr preferRelativeResize="0"/>
+          <p:nvPr/>
+        </p:nvPicPr>
+        <p:blipFill rotWithShape="1">
+          <a:blip r:embed="rId5">
+            <a:alphaModFix/>
+          </a:blip>
+          <a:srcRect/>
+          <a:stretch/>
+        </p:blipFill>
+        <p:spPr>
+          <a:xfrm>
+            <a:off x="4381500" y="2395537"/>
+            <a:ext cx="3429000" cy="3019425"/>
+          </a:xfrm>
+          <a:prstGeom prst="rect">
+            <a:avLst/>
+          </a:prstGeom>
+          <a:noFill/>
+          <a:ln>
+            <a:noFill/>
+          </a:ln>
+        </p:spPr>
+      </p:pic>
+      <p:pic>
+        <p:nvPicPr>
+          <p:cNvPr id="320" name="Google Shape;320;p31" descr="image.png"/>
+          <p:cNvPicPr preferRelativeResize="0"/>
+          <p:nvPr/>
+        </p:nvPicPr>
+        <p:blipFill rotWithShape="1">
+          <a:blip r:embed="rId6">
+            <a:alphaModFix/>
+          </a:blip>
+          <a:srcRect/>
+          <a:stretch/>
+        </p:blipFill>
+        <p:spPr>
+          <a:xfrm>
+            <a:off x="8191500" y="2395537"/>
+            <a:ext cx="3429000" cy="3019425"/>
+          </a:xfrm>
+          <a:prstGeom prst="rect">
+            <a:avLst/>
+          </a:prstGeom>
+          <a:noFill/>
+          <a:ln>
+            <a:noFill/>
+          </a:ln>
+        </p:spPr>
+      </p:pic>
+      <p:sp>
+        <p:nvSpPr>
+          <p:cNvPr id="321" name="Google Shape;321;p31"/>
+          <p:cNvSpPr txBox="1"/>
+          <p:nvPr/>
+        </p:nvSpPr>
+        <p:spPr>
+          <a:xfrm>
+            <a:off x="1735931" y="3405187"/>
+            <a:ext cx="1100137" cy="457200"/>
+          </a:xfrm>
+          <a:prstGeom prst="rect">
+            <a:avLst/>
+          </a:prstGeom>
+          <a:noFill/>
+          <a:ln>
+            <a:noFill/>
+          </a:ln>
+        </p:spPr>
+        <p:txBody>
+          <a:bodyPr spcFirstLastPara="1" wrap="square" lIns="0" tIns="0" rIns="0" bIns="0" anchor="t" anchorCtr="0">
+            <a:spAutoFit/>
+          </a:bodyPr>
+          <a:lstStyle/>
+          <a:p>
+            <a:pPr marL="0" marR="0" lvl="0" indent="0" algn="ctr" rtl="0">
+              <a:spcBef>
+                <a:spcPts val="0"/>
+              </a:spcBef>
+              <a:spcAft>
+                <a:spcPts val="0"/>
+              </a:spcAft>
+              <a:buNone/>
+            </a:pPr>
+            <a:r>
+              <a:rPr lang="en-US" sz="2400" b="0" i="0" u="none" strike="noStrike" cap="none">
+                <a:solidFill>
+                  <a:srgbClr val="E5E7EB"/>
+                </a:solidFill>
+                <a:latin typeface="Poppins"/>
+                <a:ea typeface="Poppins"/>
+                <a:cs typeface="Poppins"/>
+                <a:sym typeface="Poppins"/>
+              </a:rPr>
+              <a:t>1. Event</a:t>
+            </a:r>
+            <a:endParaRPr/>
+          </a:p>
+        </p:txBody>
+      </p:sp>
+      <p:sp>
+        <p:nvSpPr>
+          <p:cNvPr id="322" name="Google Shape;322;p31"/>
+          <p:cNvSpPr txBox="1"/>
+          <p:nvPr/>
+        </p:nvSpPr>
+        <p:spPr>
+          <a:xfrm>
+            <a:off x="866775" y="4176712"/>
+            <a:ext cx="2838450" cy="514350"/>
+          </a:xfrm>
+          <a:prstGeom prst="rect">
+            <a:avLst/>
+          </a:prstGeom>
+          <a:noFill/>
+          <a:ln>
+            <a:noFill/>
+          </a:ln>
+        </p:spPr>
+        <p:txBody>
+          <a:bodyPr spcFirstLastPara="1" wrap="square" lIns="0" tIns="0" rIns="0" bIns="0" anchor="t" anchorCtr="0">
+            <a:spAutoFit/>
+          </a:bodyPr>
+          <a:lstStyle/>
+          <a:p>
+            <a:pPr marL="0" marR="0" lvl="0" indent="0" algn="ctr" rtl="0">
+              <a:lnSpc>
+                <a:spcPct val="150000"/>
+              </a:lnSpc>
+              <a:spcBef>
+                <a:spcPts val="0"/>
+              </a:spcBef>
+              <a:spcAft>
+                <a:spcPts val="0"/>
+              </a:spcAft>
+              <a:buNone/>
+            </a:pPr>
+            <a:r>
+              <a:rPr lang="en-US" sz="1350" b="0" i="0" u="none" strike="noStrike" cap="none">
+                <a:solidFill>
+                  <a:srgbClr val="E5E7EB"/>
+                </a:solidFill>
+                <a:latin typeface="Lato"/>
+                <a:ea typeface="Lato"/>
+                <a:cs typeface="Lato"/>
+                <a:sym typeface="Lato"/>
+              </a:rPr>
+              <a:t>User clicks "Buy". (Analytics logs begin_checkout).</a:t>
+            </a:r>
+            <a:endParaRPr/>
+          </a:p>
+        </p:txBody>
+      </p:sp>
+      <p:sp>
+        <p:nvSpPr>
+          <p:cNvPr id="323" name="Google Shape;323;p31"/>
+          <p:cNvSpPr txBox="1"/>
+          <p:nvPr/>
+        </p:nvSpPr>
+        <p:spPr>
+          <a:xfrm>
+            <a:off x="4920853" y="3405187"/>
+            <a:ext cx="2350293" cy="457200"/>
+          </a:xfrm>
+          <a:prstGeom prst="rect">
+            <a:avLst/>
+          </a:prstGeom>
+          <a:noFill/>
+          <a:ln>
+            <a:noFill/>
+          </a:ln>
+        </p:spPr>
+        <p:txBody>
+          <a:bodyPr spcFirstLastPara="1" wrap="square" lIns="0" tIns="0" rIns="0" bIns="0" anchor="t" anchorCtr="0">
+            <a:spAutoFit/>
+          </a:bodyPr>
+          <a:lstStyle/>
+          <a:p>
+            <a:pPr marL="0" marR="0" lvl="0" indent="0" algn="ctr" rtl="0">
+              <a:spcBef>
+                <a:spcPts val="0"/>
+              </a:spcBef>
+              <a:spcAft>
+                <a:spcPts val="0"/>
+              </a:spcAft>
+              <a:buNone/>
+            </a:pPr>
+            <a:r>
+              <a:rPr lang="en-US" sz="2400" b="0" i="0" u="none" strike="noStrike" cap="none">
+                <a:solidFill>
+                  <a:srgbClr val="E5E7EB"/>
+                </a:solidFill>
+                <a:latin typeface="Poppins"/>
+                <a:ea typeface="Poppins"/>
+                <a:cs typeface="Poppins"/>
+                <a:sym typeface="Poppins"/>
+              </a:rPr>
+              <a:t>2. Performance</a:t>
+            </a:r>
+            <a:endParaRPr/>
+          </a:p>
+        </p:txBody>
+      </p:sp>
+      <p:sp>
+        <p:nvSpPr>
+          <p:cNvPr id="324" name="Google Shape;324;p31"/>
+          <p:cNvSpPr txBox="1"/>
+          <p:nvPr/>
+        </p:nvSpPr>
+        <p:spPr>
+          <a:xfrm>
+            <a:off x="4676775" y="4176712"/>
+            <a:ext cx="2838450" cy="771525"/>
+          </a:xfrm>
+          <a:prstGeom prst="rect">
+            <a:avLst/>
+          </a:prstGeom>
+          <a:noFill/>
+          <a:ln>
+            <a:noFill/>
+          </a:ln>
+        </p:spPr>
+        <p:txBody>
+          <a:bodyPr spcFirstLastPara="1" wrap="square" lIns="0" tIns="0" rIns="0" bIns="0" anchor="t" anchorCtr="0">
+            <a:spAutoFit/>
+          </a:bodyPr>
+          <a:lstStyle/>
+          <a:p>
+            <a:pPr marL="0" marR="0" lvl="0" indent="0" algn="ctr" rtl="0">
+              <a:lnSpc>
+                <a:spcPct val="150000"/>
+              </a:lnSpc>
+              <a:spcBef>
+                <a:spcPts val="0"/>
+              </a:spcBef>
+              <a:spcAft>
+                <a:spcPts val="0"/>
+              </a:spcAft>
+              <a:buNone/>
+            </a:pPr>
+            <a:r>
+              <a:rPr lang="en-US" sz="1350" b="0" i="0" u="none" strike="noStrike" cap="none">
+                <a:solidFill>
+                  <a:srgbClr val="E5E7EB"/>
+                </a:solidFill>
+                <a:latin typeface="Lato"/>
+                <a:ea typeface="Lato"/>
+                <a:cs typeface="Lato"/>
+                <a:sym typeface="Lato"/>
+              </a:rPr>
+              <a:t>checkout_trace starts. Network call to /payment is </a:t>
+            </a:r>
+            <a:r>
+              <a:rPr lang="en-US" sz="1350" b="1" i="0" u="none" strike="noStrike" cap="none">
+                <a:solidFill>
+                  <a:srgbClr val="E5E7EB"/>
+                </a:solidFill>
+                <a:latin typeface="Lato"/>
+                <a:ea typeface="Lato"/>
+                <a:cs typeface="Lato"/>
+                <a:sym typeface="Lato"/>
+              </a:rPr>
+              <a:t>slow (5.2s)</a:t>
+            </a:r>
+            <a:r>
+              <a:rPr lang="en-US" sz="1350" b="0" i="0" u="none" strike="noStrike" cap="none">
+                <a:solidFill>
+                  <a:srgbClr val="E5E7EB"/>
+                </a:solidFill>
+                <a:latin typeface="Lato"/>
+                <a:ea typeface="Lato"/>
+                <a:cs typeface="Lato"/>
+                <a:sym typeface="Lato"/>
+              </a:rPr>
+              <a:t>. (Performance alerts).</a:t>
+            </a:r>
+            <a:endParaRPr/>
+          </a:p>
+        </p:txBody>
+      </p:sp>
+      <p:sp>
+        <p:nvSpPr>
+          <p:cNvPr id="325" name="Google Shape;325;p31"/>
+          <p:cNvSpPr txBox="1"/>
+          <p:nvPr/>
+        </p:nvSpPr>
+        <p:spPr>
+          <a:xfrm>
+            <a:off x="9275921" y="3405187"/>
+            <a:ext cx="1260157" cy="457200"/>
+          </a:xfrm>
+          <a:prstGeom prst="rect">
+            <a:avLst/>
+          </a:prstGeom>
+          <a:noFill/>
+          <a:ln>
+            <a:noFill/>
+          </a:ln>
+        </p:spPr>
+        <p:txBody>
+          <a:bodyPr spcFirstLastPara="1" wrap="square" lIns="0" tIns="0" rIns="0" bIns="0" anchor="t" anchorCtr="0">
+            <a:spAutoFit/>
+          </a:bodyPr>
+          <a:lstStyle/>
+          <a:p>
+            <a:pPr marL="0" marR="0" lvl="0" indent="0" algn="ctr" rtl="0">
+              <a:spcBef>
+                <a:spcPts val="0"/>
+              </a:spcBef>
+              <a:spcAft>
+                <a:spcPts val="0"/>
+              </a:spcAft>
+              <a:buNone/>
+            </a:pPr>
+            <a:r>
+              <a:rPr lang="en-US" sz="2400" b="0" i="0" u="none" strike="noStrike" cap="none">
+                <a:solidFill>
+                  <a:srgbClr val="E5E7EB"/>
+                </a:solidFill>
+                <a:latin typeface="Poppins"/>
+                <a:ea typeface="Poppins"/>
+                <a:cs typeface="Poppins"/>
+                <a:sym typeface="Poppins"/>
+              </a:rPr>
+              <a:t>3. Crash</a:t>
+            </a:r>
+            <a:endParaRPr/>
+          </a:p>
+        </p:txBody>
+      </p:sp>
+      <p:sp>
+        <p:nvSpPr>
+          <p:cNvPr id="326" name="Google Shape;326;p31"/>
+          <p:cNvSpPr txBox="1"/>
+          <p:nvPr/>
+        </p:nvSpPr>
+        <p:spPr>
+          <a:xfrm>
+            <a:off x="8486775" y="4176712"/>
+            <a:ext cx="2838450" cy="771525"/>
+          </a:xfrm>
+          <a:prstGeom prst="rect">
+            <a:avLst/>
+          </a:prstGeom>
+          <a:noFill/>
+          <a:ln>
+            <a:noFill/>
+          </a:ln>
+        </p:spPr>
+        <p:txBody>
+          <a:bodyPr spcFirstLastPara="1" wrap="square" lIns="0" tIns="0" rIns="0" bIns="0" anchor="t" anchorCtr="0">
+            <a:spAutoFit/>
+          </a:bodyPr>
+          <a:lstStyle/>
+          <a:p>
+            <a:pPr marL="0" marR="0" lvl="0" indent="0" algn="ctr" rtl="0">
+              <a:lnSpc>
+                <a:spcPct val="150000"/>
+              </a:lnSpc>
+              <a:spcBef>
+                <a:spcPts val="0"/>
+              </a:spcBef>
+              <a:spcAft>
+                <a:spcPts val="0"/>
+              </a:spcAft>
+              <a:buNone/>
+            </a:pPr>
+            <a:r>
+              <a:rPr lang="en-US" sz="1350" b="0" i="0" u="none" strike="noStrike" cap="none">
+                <a:solidFill>
+                  <a:srgbClr val="E5E7EB"/>
+                </a:solidFill>
+                <a:latin typeface="Lato"/>
+                <a:ea typeface="Lato"/>
+                <a:cs typeface="Lato"/>
+                <a:sym typeface="Lato"/>
+              </a:rPr>
+              <a:t>App crashes due to an unexpected null response from the slow /payment API. (Crashlytics reports).</a:t>
+            </a:r>
+            <a:endParaRPr/>
+          </a:p>
+        </p:txBody>
+      </p:sp>
+      <p:pic>
+        <p:nvPicPr>
+          <p:cNvPr id="327" name="Google Shape;327;p31" descr="image.png"/>
+          <p:cNvPicPr preferRelativeResize="0"/>
+          <p:nvPr/>
+        </p:nvPicPr>
+        <p:blipFill rotWithShape="1">
+          <a:blip r:embed="rId7">
+            <a:alphaModFix/>
+          </a:blip>
+          <a:srcRect/>
+          <a:stretch/>
+        </p:blipFill>
+        <p:spPr>
+          <a:xfrm>
+            <a:off x="2143125" y="2709862"/>
+            <a:ext cx="285750" cy="457200"/>
+          </a:xfrm>
+          <a:prstGeom prst="rect">
+            <a:avLst/>
+          </a:prstGeom>
+          <a:noFill/>
+          <a:ln>
+            <a:noFill/>
+          </a:ln>
+        </p:spPr>
+      </p:pic>
+      <p:pic>
+        <p:nvPicPr>
+          <p:cNvPr id="328" name="Google Shape;328;p31" descr="image.png"/>
+          <p:cNvPicPr preferRelativeResize="0"/>
+          <p:nvPr/>
+        </p:nvPicPr>
+        <p:blipFill rotWithShape="1">
+          <a:blip r:embed="rId8">
+            <a:alphaModFix/>
+          </a:blip>
+          <a:srcRect/>
+          <a:stretch/>
+        </p:blipFill>
+        <p:spPr>
+          <a:xfrm>
+            <a:off x="5867400" y="2709862"/>
+            <a:ext cx="457200" cy="457200"/>
+          </a:xfrm>
+          <a:prstGeom prst="rect">
+            <a:avLst/>
+          </a:prstGeom>
+          <a:noFill/>
+          <a:ln>
+            <a:noFill/>
+          </a:ln>
+        </p:spPr>
+      </p:pic>
+      <p:pic>
+        <p:nvPicPr>
+          <p:cNvPr id="329" name="Google Shape;329;p31" descr="image.png"/>
+          <p:cNvPicPr preferRelativeResize="0"/>
+          <p:nvPr/>
+        </p:nvPicPr>
+        <p:blipFill rotWithShape="1">
+          <a:blip r:embed="rId9">
+            <a:alphaModFix/>
+          </a:blip>
+          <a:srcRect/>
+          <a:stretch/>
+        </p:blipFill>
+        <p:spPr>
+          <a:xfrm>
+            <a:off x="9677400" y="2709862"/>
+            <a:ext cx="457200" cy="457200"/>
+          </a:xfrm>
+          <a:prstGeom prst="rect">
+            <a:avLst/>
+          </a:prstGeom>
+          <a:noFill/>
+          <a:ln>
+            <a:noFill/>
+          </a:ln>
+        </p:spPr>
+      </p:pic>
+      <p:sp>
+        <p:nvSpPr>
+          <p:cNvPr id="330" name="Google Shape;330;p31"/>
+          <p:cNvSpPr txBox="1"/>
+          <p:nvPr/>
+        </p:nvSpPr>
+        <p:spPr>
+          <a:xfrm>
+            <a:off x="571500" y="571500"/>
+            <a:ext cx="11601450" cy="461665"/>
+          </a:xfrm>
+          <a:prstGeom prst="rect">
+            <a:avLst/>
+          </a:prstGeom>
+          <a:noFill/>
+          <a:ln>
+            <a:noFill/>
+          </a:ln>
+        </p:spPr>
+        <p:txBody>
+          <a:bodyPr spcFirstLastPara="1" wrap="square" lIns="0" tIns="0" rIns="0" bIns="0" anchor="t" anchorCtr="0">
+            <a:spAutoFit/>
+          </a:bodyPr>
+          <a:lstStyle/>
+          <a:p>
+            <a:pPr marL="0" marR="0" lvl="0" indent="0" algn="l" rtl="0">
+              <a:spcBef>
+                <a:spcPts val="0"/>
+              </a:spcBef>
+              <a:spcAft>
+                <a:spcPts val="0"/>
+              </a:spcAft>
+              <a:buNone/>
+            </a:pPr>
+            <a:r>
+              <a:rPr lang="en-US" sz="3000" b="0" i="0" u="none" strike="noStrike" cap="none" dirty="0">
+                <a:solidFill>
+                  <a:srgbClr val="06B6D4"/>
+                </a:solidFill>
+                <a:latin typeface="Poppins"/>
+                <a:ea typeface="Poppins"/>
+                <a:cs typeface="Poppins"/>
+                <a:sym typeface="Poppins"/>
+              </a:rPr>
+              <a:t>Real life example</a:t>
+            </a:r>
+            <a:endParaRPr dirty="0"/>
+          </a:p>
+        </p:txBody>
+      </p:sp>
+    </p:spTree>
+  </p:cSld>
+  <p:clrMapOvr>
+    <a:masterClrMapping/>
+  </p:clrMapOvr>
+</p:sld>
+</file>
+
+<file path=ppt/slides/slide2.xml><?xml version="1.0" encoding="utf-8"?>
+<p:sld xmlns:a="http://schemas.openxmlformats.org/drawingml/2006/main" xmlns:r="http://schemas.openxmlformats.org/officeDocument/2006/relationships" xmlns:p="http://schemas.openxmlformats.org/presentationml/2006/main">
+  <p:cSld>
+    <p:spTree>
+      <p:nvGrpSpPr>
+        <p:cNvPr id="1" name="Shape 90"/>
+        <p:cNvGrpSpPr/>
+        <p:nvPr/>
+      </p:nvGrpSpPr>
+      <p:grpSpPr>
+        <a:xfrm>
+          <a:off x="0" y="0"/>
+          <a:ext cx="0" cy="0"/>
+          <a:chOff x="0" y="0"/>
+          <a:chExt cx="0" cy="0"/>
+        </a:xfrm>
+      </p:grpSpPr>
+      <p:pic>
+        <p:nvPicPr>
+          <p:cNvPr id="91" name="Google Shape;91;p14" descr="image.png"/>
+          <p:cNvPicPr preferRelativeResize="0"/>
+          <p:nvPr/>
+        </p:nvPicPr>
+        <p:blipFill rotWithShape="1">
+          <a:blip r:embed="rId3">
+            <a:alphaModFix/>
+          </a:blip>
+          <a:srcRect/>
+          <a:stretch/>
+        </p:blipFill>
+        <p:spPr>
+          <a:xfrm>
+            <a:off x="0" y="0"/>
+            <a:ext cx="12192000" cy="6858000"/>
+          </a:xfrm>
+          <a:prstGeom prst="rect">
+            <a:avLst/>
+          </a:prstGeom>
+          <a:noFill/>
+          <a:ln>
+            <a:noFill/>
+          </a:ln>
+        </p:spPr>
+      </p:pic>
+      <p:sp>
+        <p:nvSpPr>
+          <p:cNvPr id="92" name="Google Shape;92;p14"/>
+          <p:cNvSpPr txBox="1"/>
+          <p:nvPr/>
+        </p:nvSpPr>
+        <p:spPr>
+          <a:xfrm>
+            <a:off x="5033157" y="2429066"/>
+            <a:ext cx="2125683" cy="380873"/>
+          </a:xfrm>
+          <a:prstGeom prst="rect">
+            <a:avLst/>
+          </a:prstGeom>
+          <a:noFill/>
+          <a:ln>
+            <a:noFill/>
+          </a:ln>
+        </p:spPr>
+        <p:txBody>
+          <a:bodyPr spcFirstLastPara="1" wrap="square" lIns="0" tIns="0" rIns="0" bIns="0" anchor="t" anchorCtr="0">
+            <a:spAutoFit/>
+          </a:bodyPr>
+          <a:lstStyle/>
+          <a:p>
+            <a:pPr marL="0" marR="0" lvl="0" indent="0" algn="ctr" rtl="0">
+              <a:lnSpc>
+                <a:spcPct val="150000"/>
+              </a:lnSpc>
+              <a:spcBef>
+                <a:spcPts val="0"/>
+              </a:spcBef>
+              <a:spcAft>
+                <a:spcPts val="0"/>
+              </a:spcAft>
+              <a:buNone/>
+            </a:pPr>
+            <a:r>
+              <a:rPr lang="en-US" sz="1650" b="0" i="0" u="none" strike="noStrike" cap="none" dirty="0">
+                <a:solidFill>
+                  <a:srgbClr val="E5E7EB"/>
+                </a:solidFill>
+                <a:latin typeface="Lato"/>
+                <a:ea typeface="Lato"/>
+                <a:cs typeface="Lato"/>
+                <a:sym typeface="Lato"/>
+              </a:rPr>
+              <a:t>Section 1</a:t>
+            </a:r>
+            <a:endParaRPr dirty="0"/>
+          </a:p>
+        </p:txBody>
+      </p:sp>
+      <p:sp>
+        <p:nvSpPr>
+          <p:cNvPr id="93" name="Google Shape;93;p14"/>
+          <p:cNvSpPr/>
+          <p:nvPr/>
+        </p:nvSpPr>
+        <p:spPr>
+          <a:xfrm>
+            <a:off x="5619749" y="3024375"/>
+            <a:ext cx="952500" cy="47625"/>
+          </a:xfrm>
+          <a:prstGeom prst="rect">
+            <a:avLst/>
+          </a:prstGeom>
+          <a:solidFill>
+            <a:srgbClr val="06B6D4"/>
+          </a:solidFill>
+          <a:ln>
+            <a:noFill/>
+          </a:ln>
+        </p:spPr>
+        <p:txBody>
+          <a:bodyPr spcFirstLastPara="1" wrap="square" lIns="91425" tIns="45700" rIns="91425" bIns="45700" anchor="ctr" anchorCtr="0">
+            <a:noAutofit/>
+          </a:bodyPr>
+          <a:lstStyle/>
+          <a:p>
+            <a:pPr marL="0" marR="0" lvl="0" indent="0" algn="ctr" rtl="0">
+              <a:spcBef>
+                <a:spcPts val="0"/>
+              </a:spcBef>
+              <a:spcAft>
+                <a:spcPts val="0"/>
+              </a:spcAft>
+              <a:buNone/>
+            </a:pPr>
+            <a:endParaRPr sz="1800" b="0" i="0" u="none" strike="noStrike" cap="none">
+              <a:solidFill>
+                <a:schemeClr val="dk1"/>
+              </a:solidFill>
+              <a:latin typeface="Calibri"/>
+              <a:ea typeface="Calibri"/>
+              <a:cs typeface="Calibri"/>
+              <a:sym typeface="Calibri"/>
+            </a:endParaRPr>
+          </a:p>
+        </p:txBody>
+      </p:sp>
+      <p:sp>
+        <p:nvSpPr>
+          <p:cNvPr id="94" name="Google Shape;94;p14"/>
+          <p:cNvSpPr txBox="1"/>
+          <p:nvPr/>
+        </p:nvSpPr>
+        <p:spPr>
+          <a:xfrm>
+            <a:off x="1860470" y="3214687"/>
+            <a:ext cx="8471058" cy="857250"/>
+          </a:xfrm>
+          <a:prstGeom prst="rect">
+            <a:avLst/>
+          </a:prstGeom>
+          <a:noFill/>
+          <a:ln>
+            <a:noFill/>
+          </a:ln>
+        </p:spPr>
+        <p:txBody>
+          <a:bodyPr spcFirstLastPara="1" wrap="square" lIns="0" tIns="0" rIns="0" bIns="0" anchor="t" anchorCtr="0">
+            <a:spAutoFit/>
+          </a:bodyPr>
+          <a:lstStyle/>
+          <a:p>
+            <a:pPr marL="0" marR="0" lvl="0" indent="0" algn="ctr" rtl="0">
+              <a:spcBef>
+                <a:spcPts val="0"/>
+              </a:spcBef>
+              <a:spcAft>
+                <a:spcPts val="0"/>
+              </a:spcAft>
+              <a:buNone/>
+            </a:pPr>
+            <a:r>
+              <a:rPr lang="en-US" sz="4500" b="1" i="0" u="none" strike="noStrike" cap="none">
+                <a:solidFill>
+                  <a:srgbClr val="F9FAFB"/>
+                </a:solidFill>
+                <a:latin typeface="Poppins"/>
+                <a:ea typeface="Poppins"/>
+                <a:cs typeface="Poppins"/>
+                <a:sym typeface="Poppins"/>
+              </a:rPr>
+              <a:t>Mobile API Communication</a:t>
+            </a:r>
+            <a:endParaRPr/>
+          </a:p>
+        </p:txBody>
+      </p:sp>
+    </p:spTree>
+  </p:cSld>
+  <p:clrMapOvr>
+    <a:masterClrMapping/>
+  </p:clrMapOvr>
+</p:sld>
+</file>
+
+<file path=ppt/slides/slide20.xml><?xml version="1.0" encoding="utf-8"?>
+<p:sld xmlns:a="http://schemas.openxmlformats.org/drawingml/2006/main" xmlns:r="http://schemas.openxmlformats.org/officeDocument/2006/relationships" xmlns:p="http://schemas.openxmlformats.org/presentationml/2006/main">
+  <p:cSld>
     <p:bg>
       <p:bgPr>
         <a:solidFill>
@@ -10677,210 +11477,7 @@
 </p:sld>
 </file>
 
-<file path=ppt/slides/slide2.xml><?xml version="1.0" encoding="utf-8"?>
-<p:sld xmlns:a="http://schemas.openxmlformats.org/drawingml/2006/main" xmlns:r="http://schemas.openxmlformats.org/officeDocument/2006/relationships" xmlns:p="http://schemas.openxmlformats.org/presentationml/2006/main">
-  <p:cSld>
-    <p:spTree>
-      <p:nvGrpSpPr>
-        <p:cNvPr id="1" name="Shape 90"/>
-        <p:cNvGrpSpPr/>
-        <p:nvPr/>
-      </p:nvGrpSpPr>
-      <p:grpSpPr>
-        <a:xfrm>
-          <a:off x="0" y="0"/>
-          <a:ext cx="0" cy="0"/>
-          <a:chOff x="0" y="0"/>
-          <a:chExt cx="0" cy="0"/>
-        </a:xfrm>
-      </p:grpSpPr>
-      <p:pic>
-        <p:nvPicPr>
-          <p:cNvPr id="91" name="Google Shape;91;p14" descr="image.png"/>
-          <p:cNvPicPr preferRelativeResize="0"/>
-          <p:nvPr/>
-        </p:nvPicPr>
-        <p:blipFill rotWithShape="1">
-          <a:blip r:embed="rId3">
-            <a:alphaModFix/>
-          </a:blip>
-          <a:srcRect/>
-          <a:stretch/>
-        </p:blipFill>
-        <p:spPr>
-          <a:xfrm>
-            <a:off x="0" y="0"/>
-            <a:ext cx="12192000" cy="6858000"/>
-          </a:xfrm>
-          <a:prstGeom prst="rect">
-            <a:avLst/>
-          </a:prstGeom>
-          <a:noFill/>
-          <a:ln>
-            <a:noFill/>
-          </a:ln>
-        </p:spPr>
-      </p:pic>
-      <p:sp>
-        <p:nvSpPr>
-          <p:cNvPr id="92" name="Google Shape;92;p14"/>
-          <p:cNvSpPr txBox="1"/>
-          <p:nvPr/>
-        </p:nvSpPr>
-        <p:spPr>
-          <a:xfrm>
-            <a:off x="5033157" y="2429066"/>
-            <a:ext cx="2125683" cy="380873"/>
-          </a:xfrm>
-          <a:prstGeom prst="rect">
-            <a:avLst/>
-          </a:prstGeom>
-          <a:noFill/>
-          <a:ln>
-            <a:noFill/>
-          </a:ln>
-        </p:spPr>
-        <p:txBody>
-          <a:bodyPr spcFirstLastPara="1" wrap="square" lIns="0" tIns="0" rIns="0" bIns="0" anchor="t" anchorCtr="0">
-            <a:spAutoFit/>
-          </a:bodyPr>
-          <a:lstStyle/>
-          <a:p>
-            <a:pPr marL="0" marR="0" lvl="0" indent="0" algn="ctr" rtl="0">
-              <a:lnSpc>
-                <a:spcPct val="150000"/>
-              </a:lnSpc>
-              <a:spcBef>
-                <a:spcPts val="0"/>
-              </a:spcBef>
-              <a:spcAft>
-                <a:spcPts val="0"/>
-              </a:spcAft>
-              <a:buNone/>
-            </a:pPr>
-            <a:r>
-              <a:rPr lang="en-US" sz="1650" b="0" i="0" u="none" strike="noStrike" cap="none" dirty="0">
-                <a:solidFill>
-                  <a:srgbClr val="E5E7EB"/>
-                </a:solidFill>
-                <a:latin typeface="Lato"/>
-                <a:ea typeface="Lato"/>
-                <a:cs typeface="Lato"/>
-                <a:sym typeface="Lato"/>
-              </a:rPr>
-              <a:t>Section 1</a:t>
-            </a:r>
-            <a:endParaRPr dirty="0"/>
-          </a:p>
-        </p:txBody>
-      </p:sp>
-      <p:sp>
-        <p:nvSpPr>
-          <p:cNvPr id="93" name="Google Shape;93;p14"/>
-          <p:cNvSpPr/>
-          <p:nvPr/>
-        </p:nvSpPr>
-        <p:spPr>
-          <a:xfrm>
-            <a:off x="5619749" y="3024375"/>
-            <a:ext cx="952500" cy="47625"/>
-          </a:xfrm>
-          <a:prstGeom prst="rect">
-            <a:avLst/>
-          </a:prstGeom>
-          <a:solidFill>
-            <a:srgbClr val="06B6D4"/>
-          </a:solidFill>
-          <a:ln>
-            <a:noFill/>
-          </a:ln>
-        </p:spPr>
-        <p:txBody>
-          <a:bodyPr spcFirstLastPara="1" wrap="square" lIns="91425" tIns="45700" rIns="91425" bIns="45700" anchor="ctr" anchorCtr="0">
-            <a:noAutofit/>
-          </a:bodyPr>
-          <a:lstStyle/>
-          <a:p>
-            <a:pPr marL="0" marR="0" lvl="0" indent="0" algn="ctr" rtl="0">
-              <a:spcBef>
-                <a:spcPts val="0"/>
-              </a:spcBef>
-              <a:spcAft>
-                <a:spcPts val="0"/>
-              </a:spcAft>
-              <a:buNone/>
-            </a:pPr>
-            <a:endParaRPr sz="1800" b="0" i="0" u="none" strike="noStrike" cap="none">
-              <a:solidFill>
-                <a:schemeClr val="dk1"/>
-              </a:solidFill>
-              <a:latin typeface="Calibri"/>
-              <a:ea typeface="Calibri"/>
-              <a:cs typeface="Calibri"/>
-              <a:sym typeface="Calibri"/>
-            </a:endParaRPr>
-          </a:p>
-        </p:txBody>
-      </p:sp>
-      <p:sp>
-        <p:nvSpPr>
-          <p:cNvPr id="94" name="Google Shape;94;p14"/>
-          <p:cNvSpPr txBox="1"/>
-          <p:nvPr/>
-        </p:nvSpPr>
-        <p:spPr>
-          <a:xfrm>
-            <a:off x="1860470" y="3214687"/>
-            <a:ext cx="8471058" cy="857250"/>
-          </a:xfrm>
-          <a:prstGeom prst="rect">
-            <a:avLst/>
-          </a:prstGeom>
-          <a:noFill/>
-          <a:ln>
-            <a:noFill/>
-          </a:ln>
-        </p:spPr>
-        <p:txBody>
-          <a:bodyPr spcFirstLastPara="1" wrap="square" lIns="0" tIns="0" rIns="0" bIns="0" anchor="t" anchorCtr="0">
-            <a:spAutoFit/>
-          </a:bodyPr>
-          <a:lstStyle/>
-          <a:p>
-            <a:pPr marL="0" marR="0" lvl="0" indent="0" algn="ctr" rtl="0">
-              <a:spcBef>
-                <a:spcPts val="0"/>
-              </a:spcBef>
-              <a:spcAft>
-                <a:spcPts val="0"/>
-              </a:spcAft>
-              <a:buNone/>
-            </a:pPr>
-            <a:r>
-              <a:rPr lang="en-US" sz="4500" b="1" i="0" u="none" strike="noStrike" cap="none">
-                <a:solidFill>
-                  <a:srgbClr val="F9FAFB"/>
-                </a:solidFill>
-                <a:latin typeface="Poppins"/>
-                <a:ea typeface="Poppins"/>
-                <a:cs typeface="Poppins"/>
-                <a:sym typeface="Poppins"/>
-              </a:rPr>
-              <a:t>Mobile API Communication</a:t>
-            </a:r>
-            <a:endParaRPr/>
-          </a:p>
-        </p:txBody>
-      </p:sp>
-    </p:spTree>
-  </p:cSld>
-  <p:clrMapOvr>
-    <a:masterClrMapping/>
-  </p:clrMapOvr>
-</p:sld>
-</file>
-
-<file path=ppt/slides/slide20.xml><?xml version="1.0" encoding="utf-8"?>
+<file path=ppt/slides/slide21.xml><?xml version="1.0" encoding="utf-8"?>
 <p:sld xmlns:a="http://schemas.openxmlformats.org/drawingml/2006/main" xmlns:r="http://schemas.openxmlformats.org/officeDocument/2006/relationships" xmlns:p="http://schemas.openxmlformats.org/presentationml/2006/main">
   <p:cSld>
     <p:bg>
@@ -11506,7 +12103,7 @@
 </p:sld>
 </file>
 
-<file path=ppt/slides/slide21.xml><?xml version="1.0" encoding="utf-8"?>
+<file path=ppt/slides/slide22.xml><?xml version="1.0" encoding="utf-8"?>
 <p:sld xmlns:a="http://schemas.openxmlformats.org/drawingml/2006/main" xmlns:r="http://schemas.openxmlformats.org/officeDocument/2006/relationships" xmlns:p="http://schemas.openxmlformats.org/presentationml/2006/main">
   <p:cSld>
     <p:bg>
@@ -12132,7 +12729,7 @@
 </p:sld>
 </file>
 
-<file path=ppt/slides/slide22.xml><?xml version="1.0" encoding="utf-8"?>
+<file path=ppt/slides/slide23.xml><?xml version="1.0" encoding="utf-8"?>
 <p:sld xmlns:a="http://schemas.openxmlformats.org/drawingml/2006/main" xmlns:r="http://schemas.openxmlformats.org/officeDocument/2006/relationships" xmlns:p="http://schemas.openxmlformats.org/presentationml/2006/main">
   <p:cSld>
     <p:bg>
@@ -12758,7 +13355,7 @@
 </p:sld>
 </file>
 
-<file path=ppt/slides/slide23.xml><?xml version="1.0" encoding="utf-8"?>
+<file path=ppt/slides/slide24.xml><?xml version="1.0" encoding="utf-8"?>
 <p:sld xmlns:a="http://schemas.openxmlformats.org/drawingml/2006/main" xmlns:r="http://schemas.openxmlformats.org/officeDocument/2006/relationships" xmlns:p="http://schemas.openxmlformats.org/presentationml/2006/main">
   <p:cSld>
     <p:bg>
@@ -13384,7 +13981,7 @@
 </p:sld>
 </file>
 
-<file path=ppt/slides/slide24.xml><?xml version="1.0" encoding="utf-8"?>
+<file path=ppt/slides/slide25.xml><?xml version="1.0" encoding="utf-8"?>
 <p:sld xmlns:a="http://schemas.openxmlformats.org/drawingml/2006/main" xmlns:r="http://schemas.openxmlformats.org/officeDocument/2006/relationships" xmlns:p="http://schemas.openxmlformats.org/presentationml/2006/main">
   <p:cSld>
     <p:bg>
@@ -14010,7 +14607,7 @@
 </p:sld>
 </file>
 
-<file path=ppt/slides/slide25.xml><?xml version="1.0" encoding="utf-8"?>
+<file path=ppt/slides/slide26.xml><?xml version="1.0" encoding="utf-8"?>
 <p:sld xmlns:a="http://schemas.openxmlformats.org/drawingml/2006/main" xmlns:r="http://schemas.openxmlformats.org/officeDocument/2006/relationships" xmlns:p="http://schemas.openxmlformats.org/presentationml/2006/main">
   <p:cSld>
     <p:bg>
@@ -14636,7 +15233,7 @@
 </p:sld>
 </file>
 
-<file path=ppt/slides/slide26.xml><?xml version="1.0" encoding="utf-8"?>
+<file path=ppt/slides/slide27.xml><?xml version="1.0" encoding="utf-8"?>
 <p:sld xmlns:a="http://schemas.openxmlformats.org/drawingml/2006/main" xmlns:r="http://schemas.openxmlformats.org/officeDocument/2006/relationships" xmlns:p="http://schemas.openxmlformats.org/presentationml/2006/main">
   <p:cSld>
     <p:bg>
@@ -15255,603 +15852,6 @@
         <p14:creationId xmlns:p14="http://schemas.microsoft.com/office/powerpoint/2010/main" val="292750815"/>
       </p:ext>
     </p:extLst>
-  </p:cSld>
-  <p:clrMapOvr>
-    <a:masterClrMapping/>
-  </p:clrMapOvr>
-</p:sld>
-</file>
-
-<file path=ppt/slides/slide27.xml><?xml version="1.0" encoding="utf-8"?>
-<p:sld xmlns:a="http://schemas.openxmlformats.org/drawingml/2006/main" xmlns:r="http://schemas.openxmlformats.org/officeDocument/2006/relationships" xmlns:p="http://schemas.openxmlformats.org/presentationml/2006/main">
-  <p:cSld>
-    <p:spTree>
-      <p:nvGrpSpPr>
-        <p:cNvPr id="1" name="Shape 316"/>
-        <p:cNvGrpSpPr/>
-        <p:nvPr/>
-      </p:nvGrpSpPr>
-      <p:grpSpPr>
-        <a:xfrm>
-          <a:off x="0" y="0"/>
-          <a:ext cx="0" cy="0"/>
-          <a:chOff x="0" y="0"/>
-          <a:chExt cx="0" cy="0"/>
-        </a:xfrm>
-      </p:grpSpPr>
-      <p:pic>
-        <p:nvPicPr>
-          <p:cNvPr id="317" name="Google Shape;317;p31" descr="image.png"/>
-          <p:cNvPicPr preferRelativeResize="0"/>
-          <p:nvPr/>
-        </p:nvPicPr>
-        <p:blipFill rotWithShape="1">
-          <a:blip r:embed="rId3">
-            <a:alphaModFix/>
-          </a:blip>
-          <a:srcRect/>
-          <a:stretch/>
-        </p:blipFill>
-        <p:spPr>
-          <a:xfrm>
-            <a:off x="0" y="0"/>
-            <a:ext cx="12192000" cy="6858000"/>
-          </a:xfrm>
-          <a:prstGeom prst="rect">
-            <a:avLst/>
-          </a:prstGeom>
-          <a:noFill/>
-          <a:ln>
-            <a:noFill/>
-          </a:ln>
-        </p:spPr>
-      </p:pic>
-      <p:pic>
-        <p:nvPicPr>
-          <p:cNvPr id="318" name="Google Shape;318;p31" descr="image.png"/>
-          <p:cNvPicPr preferRelativeResize="0"/>
-          <p:nvPr/>
-        </p:nvPicPr>
-        <p:blipFill rotWithShape="1">
-          <a:blip r:embed="rId4">
-            <a:alphaModFix/>
-          </a:blip>
-          <a:srcRect/>
-          <a:stretch/>
-        </p:blipFill>
-        <p:spPr>
-          <a:xfrm>
-            <a:off x="571500" y="2395537"/>
-            <a:ext cx="3429000" cy="3019425"/>
-          </a:xfrm>
-          <a:prstGeom prst="rect">
-            <a:avLst/>
-          </a:prstGeom>
-          <a:noFill/>
-          <a:ln>
-            <a:noFill/>
-          </a:ln>
-        </p:spPr>
-      </p:pic>
-      <p:pic>
-        <p:nvPicPr>
-          <p:cNvPr id="319" name="Google Shape;319;p31" descr="image.png"/>
-          <p:cNvPicPr preferRelativeResize="0"/>
-          <p:nvPr/>
-        </p:nvPicPr>
-        <p:blipFill rotWithShape="1">
-          <a:blip r:embed="rId5">
-            <a:alphaModFix/>
-          </a:blip>
-          <a:srcRect/>
-          <a:stretch/>
-        </p:blipFill>
-        <p:spPr>
-          <a:xfrm>
-            <a:off x="4381500" y="2395537"/>
-            <a:ext cx="3429000" cy="3019425"/>
-          </a:xfrm>
-          <a:prstGeom prst="rect">
-            <a:avLst/>
-          </a:prstGeom>
-          <a:noFill/>
-          <a:ln>
-            <a:noFill/>
-          </a:ln>
-        </p:spPr>
-      </p:pic>
-      <p:pic>
-        <p:nvPicPr>
-          <p:cNvPr id="320" name="Google Shape;320;p31" descr="image.png"/>
-          <p:cNvPicPr preferRelativeResize="0"/>
-          <p:nvPr/>
-        </p:nvPicPr>
-        <p:blipFill rotWithShape="1">
-          <a:blip r:embed="rId6">
-            <a:alphaModFix/>
-          </a:blip>
-          <a:srcRect/>
-          <a:stretch/>
-        </p:blipFill>
-        <p:spPr>
-          <a:xfrm>
-            <a:off x="8191500" y="2395537"/>
-            <a:ext cx="3429000" cy="3019425"/>
-          </a:xfrm>
-          <a:prstGeom prst="rect">
-            <a:avLst/>
-          </a:prstGeom>
-          <a:noFill/>
-          <a:ln>
-            <a:noFill/>
-          </a:ln>
-        </p:spPr>
-      </p:pic>
-      <p:sp>
-        <p:nvSpPr>
-          <p:cNvPr id="321" name="Google Shape;321;p31"/>
-          <p:cNvSpPr txBox="1"/>
-          <p:nvPr/>
-        </p:nvSpPr>
-        <p:spPr>
-          <a:xfrm>
-            <a:off x="1735931" y="3405187"/>
-            <a:ext cx="1100137" cy="457200"/>
-          </a:xfrm>
-          <a:prstGeom prst="rect">
-            <a:avLst/>
-          </a:prstGeom>
-          <a:noFill/>
-          <a:ln>
-            <a:noFill/>
-          </a:ln>
-        </p:spPr>
-        <p:txBody>
-          <a:bodyPr spcFirstLastPara="1" wrap="square" lIns="0" tIns="0" rIns="0" bIns="0" anchor="t" anchorCtr="0">
-            <a:spAutoFit/>
-          </a:bodyPr>
-          <a:lstStyle/>
-          <a:p>
-            <a:pPr marL="0" marR="0" lvl="0" indent="0" algn="ctr" rtl="0">
-              <a:spcBef>
-                <a:spcPts val="0"/>
-              </a:spcBef>
-              <a:spcAft>
-                <a:spcPts val="0"/>
-              </a:spcAft>
-              <a:buNone/>
-            </a:pPr>
-            <a:r>
-              <a:rPr lang="en-US" sz="2400" b="0" i="0" u="none" strike="noStrike" cap="none">
-                <a:solidFill>
-                  <a:srgbClr val="E5E7EB"/>
-                </a:solidFill>
-                <a:latin typeface="Poppins"/>
-                <a:ea typeface="Poppins"/>
-                <a:cs typeface="Poppins"/>
-                <a:sym typeface="Poppins"/>
-              </a:rPr>
-              <a:t>1. Event</a:t>
-            </a:r>
-            <a:endParaRPr/>
-          </a:p>
-        </p:txBody>
-      </p:sp>
-      <p:sp>
-        <p:nvSpPr>
-          <p:cNvPr id="322" name="Google Shape;322;p31"/>
-          <p:cNvSpPr txBox="1"/>
-          <p:nvPr/>
-        </p:nvSpPr>
-        <p:spPr>
-          <a:xfrm>
-            <a:off x="866775" y="4176712"/>
-            <a:ext cx="2838450" cy="514350"/>
-          </a:xfrm>
-          <a:prstGeom prst="rect">
-            <a:avLst/>
-          </a:prstGeom>
-          <a:noFill/>
-          <a:ln>
-            <a:noFill/>
-          </a:ln>
-        </p:spPr>
-        <p:txBody>
-          <a:bodyPr spcFirstLastPara="1" wrap="square" lIns="0" tIns="0" rIns="0" bIns="0" anchor="t" anchorCtr="0">
-            <a:spAutoFit/>
-          </a:bodyPr>
-          <a:lstStyle/>
-          <a:p>
-            <a:pPr marL="0" marR="0" lvl="0" indent="0" algn="ctr" rtl="0">
-              <a:lnSpc>
-                <a:spcPct val="150000"/>
-              </a:lnSpc>
-              <a:spcBef>
-                <a:spcPts val="0"/>
-              </a:spcBef>
-              <a:spcAft>
-                <a:spcPts val="0"/>
-              </a:spcAft>
-              <a:buNone/>
-            </a:pPr>
-            <a:r>
-              <a:rPr lang="en-US" sz="1350" b="0" i="0" u="none" strike="noStrike" cap="none">
-                <a:solidFill>
-                  <a:srgbClr val="E5E7EB"/>
-                </a:solidFill>
-                <a:latin typeface="Lato"/>
-                <a:ea typeface="Lato"/>
-                <a:cs typeface="Lato"/>
-                <a:sym typeface="Lato"/>
-              </a:rPr>
-              <a:t>User clicks "Buy". (Analytics logs begin_checkout).</a:t>
-            </a:r>
-            <a:endParaRPr/>
-          </a:p>
-        </p:txBody>
-      </p:sp>
-      <p:sp>
-        <p:nvSpPr>
-          <p:cNvPr id="323" name="Google Shape;323;p31"/>
-          <p:cNvSpPr txBox="1"/>
-          <p:nvPr/>
-        </p:nvSpPr>
-        <p:spPr>
-          <a:xfrm>
-            <a:off x="4920853" y="3405187"/>
-            <a:ext cx="2350293" cy="457200"/>
-          </a:xfrm>
-          <a:prstGeom prst="rect">
-            <a:avLst/>
-          </a:prstGeom>
-          <a:noFill/>
-          <a:ln>
-            <a:noFill/>
-          </a:ln>
-        </p:spPr>
-        <p:txBody>
-          <a:bodyPr spcFirstLastPara="1" wrap="square" lIns="0" tIns="0" rIns="0" bIns="0" anchor="t" anchorCtr="0">
-            <a:spAutoFit/>
-          </a:bodyPr>
-          <a:lstStyle/>
-          <a:p>
-            <a:pPr marL="0" marR="0" lvl="0" indent="0" algn="ctr" rtl="0">
-              <a:spcBef>
-                <a:spcPts val="0"/>
-              </a:spcBef>
-              <a:spcAft>
-                <a:spcPts val="0"/>
-              </a:spcAft>
-              <a:buNone/>
-            </a:pPr>
-            <a:r>
-              <a:rPr lang="en-US" sz="2400" b="0" i="0" u="none" strike="noStrike" cap="none">
-                <a:solidFill>
-                  <a:srgbClr val="E5E7EB"/>
-                </a:solidFill>
-                <a:latin typeface="Poppins"/>
-                <a:ea typeface="Poppins"/>
-                <a:cs typeface="Poppins"/>
-                <a:sym typeface="Poppins"/>
-              </a:rPr>
-              <a:t>2. Performance</a:t>
-            </a:r>
-            <a:endParaRPr/>
-          </a:p>
-        </p:txBody>
-      </p:sp>
-      <p:sp>
-        <p:nvSpPr>
-          <p:cNvPr id="324" name="Google Shape;324;p31"/>
-          <p:cNvSpPr txBox="1"/>
-          <p:nvPr/>
-        </p:nvSpPr>
-        <p:spPr>
-          <a:xfrm>
-            <a:off x="4676775" y="4176712"/>
-            <a:ext cx="2838450" cy="771525"/>
-          </a:xfrm>
-          <a:prstGeom prst="rect">
-            <a:avLst/>
-          </a:prstGeom>
-          <a:noFill/>
-          <a:ln>
-            <a:noFill/>
-          </a:ln>
-        </p:spPr>
-        <p:txBody>
-          <a:bodyPr spcFirstLastPara="1" wrap="square" lIns="0" tIns="0" rIns="0" bIns="0" anchor="t" anchorCtr="0">
-            <a:spAutoFit/>
-          </a:bodyPr>
-          <a:lstStyle/>
-          <a:p>
-            <a:pPr marL="0" marR="0" lvl="0" indent="0" algn="ctr" rtl="0">
-              <a:lnSpc>
-                <a:spcPct val="150000"/>
-              </a:lnSpc>
-              <a:spcBef>
-                <a:spcPts val="0"/>
-              </a:spcBef>
-              <a:spcAft>
-                <a:spcPts val="0"/>
-              </a:spcAft>
-              <a:buNone/>
-            </a:pPr>
-            <a:r>
-              <a:rPr lang="en-US" sz="1350" b="0" i="0" u="none" strike="noStrike" cap="none">
-                <a:solidFill>
-                  <a:srgbClr val="E5E7EB"/>
-                </a:solidFill>
-                <a:latin typeface="Lato"/>
-                <a:ea typeface="Lato"/>
-                <a:cs typeface="Lato"/>
-                <a:sym typeface="Lato"/>
-              </a:rPr>
-              <a:t>checkout_trace starts. Network call to /payment is </a:t>
-            </a:r>
-            <a:r>
-              <a:rPr lang="en-US" sz="1350" b="1" i="0" u="none" strike="noStrike" cap="none">
-                <a:solidFill>
-                  <a:srgbClr val="E5E7EB"/>
-                </a:solidFill>
-                <a:latin typeface="Lato"/>
-                <a:ea typeface="Lato"/>
-                <a:cs typeface="Lato"/>
-                <a:sym typeface="Lato"/>
-              </a:rPr>
-              <a:t>slow (5.2s)</a:t>
-            </a:r>
-            <a:r>
-              <a:rPr lang="en-US" sz="1350" b="0" i="0" u="none" strike="noStrike" cap="none">
-                <a:solidFill>
-                  <a:srgbClr val="E5E7EB"/>
-                </a:solidFill>
-                <a:latin typeface="Lato"/>
-                <a:ea typeface="Lato"/>
-                <a:cs typeface="Lato"/>
-                <a:sym typeface="Lato"/>
-              </a:rPr>
-              <a:t>. (Performance alerts).</a:t>
-            </a:r>
-            <a:endParaRPr/>
-          </a:p>
-        </p:txBody>
-      </p:sp>
-      <p:sp>
-        <p:nvSpPr>
-          <p:cNvPr id="325" name="Google Shape;325;p31"/>
-          <p:cNvSpPr txBox="1"/>
-          <p:nvPr/>
-        </p:nvSpPr>
-        <p:spPr>
-          <a:xfrm>
-            <a:off x="9275921" y="3405187"/>
-            <a:ext cx="1260157" cy="457200"/>
-          </a:xfrm>
-          <a:prstGeom prst="rect">
-            <a:avLst/>
-          </a:prstGeom>
-          <a:noFill/>
-          <a:ln>
-            <a:noFill/>
-          </a:ln>
-        </p:spPr>
-        <p:txBody>
-          <a:bodyPr spcFirstLastPara="1" wrap="square" lIns="0" tIns="0" rIns="0" bIns="0" anchor="t" anchorCtr="0">
-            <a:spAutoFit/>
-          </a:bodyPr>
-          <a:lstStyle/>
-          <a:p>
-            <a:pPr marL="0" marR="0" lvl="0" indent="0" algn="ctr" rtl="0">
-              <a:spcBef>
-                <a:spcPts val="0"/>
-              </a:spcBef>
-              <a:spcAft>
-                <a:spcPts val="0"/>
-              </a:spcAft>
-              <a:buNone/>
-            </a:pPr>
-            <a:r>
-              <a:rPr lang="en-US" sz="2400" b="0" i="0" u="none" strike="noStrike" cap="none">
-                <a:solidFill>
-                  <a:srgbClr val="E5E7EB"/>
-                </a:solidFill>
-                <a:latin typeface="Poppins"/>
-                <a:ea typeface="Poppins"/>
-                <a:cs typeface="Poppins"/>
-                <a:sym typeface="Poppins"/>
-              </a:rPr>
-              <a:t>3. Crash</a:t>
-            </a:r>
-            <a:endParaRPr/>
-          </a:p>
-        </p:txBody>
-      </p:sp>
-      <p:sp>
-        <p:nvSpPr>
-          <p:cNvPr id="326" name="Google Shape;326;p31"/>
-          <p:cNvSpPr txBox="1"/>
-          <p:nvPr/>
-        </p:nvSpPr>
-        <p:spPr>
-          <a:xfrm>
-            <a:off x="8486775" y="4176712"/>
-            <a:ext cx="2838450" cy="771525"/>
-          </a:xfrm>
-          <a:prstGeom prst="rect">
-            <a:avLst/>
-          </a:prstGeom>
-          <a:noFill/>
-          <a:ln>
-            <a:noFill/>
-          </a:ln>
-        </p:spPr>
-        <p:txBody>
-          <a:bodyPr spcFirstLastPara="1" wrap="square" lIns="0" tIns="0" rIns="0" bIns="0" anchor="t" anchorCtr="0">
-            <a:spAutoFit/>
-          </a:bodyPr>
-          <a:lstStyle/>
-          <a:p>
-            <a:pPr marL="0" marR="0" lvl="0" indent="0" algn="ctr" rtl="0">
-              <a:lnSpc>
-                <a:spcPct val="150000"/>
-              </a:lnSpc>
-              <a:spcBef>
-                <a:spcPts val="0"/>
-              </a:spcBef>
-              <a:spcAft>
-                <a:spcPts val="0"/>
-              </a:spcAft>
-              <a:buNone/>
-            </a:pPr>
-            <a:r>
-              <a:rPr lang="en-US" sz="1350" b="0" i="0" u="none" strike="noStrike" cap="none">
-                <a:solidFill>
-                  <a:srgbClr val="E5E7EB"/>
-                </a:solidFill>
-                <a:latin typeface="Lato"/>
-                <a:ea typeface="Lato"/>
-                <a:cs typeface="Lato"/>
-                <a:sym typeface="Lato"/>
-              </a:rPr>
-              <a:t>App crashes due to an unexpected null response from the slow /payment API. (Crashlytics reports).</a:t>
-            </a:r>
-            <a:endParaRPr/>
-          </a:p>
-        </p:txBody>
-      </p:sp>
-      <p:pic>
-        <p:nvPicPr>
-          <p:cNvPr id="327" name="Google Shape;327;p31" descr="image.png"/>
-          <p:cNvPicPr preferRelativeResize="0"/>
-          <p:nvPr/>
-        </p:nvPicPr>
-        <p:blipFill rotWithShape="1">
-          <a:blip r:embed="rId7">
-            <a:alphaModFix/>
-          </a:blip>
-          <a:srcRect/>
-          <a:stretch/>
-        </p:blipFill>
-        <p:spPr>
-          <a:xfrm>
-            <a:off x="2143125" y="2709862"/>
-            <a:ext cx="285750" cy="457200"/>
-          </a:xfrm>
-          <a:prstGeom prst="rect">
-            <a:avLst/>
-          </a:prstGeom>
-          <a:noFill/>
-          <a:ln>
-            <a:noFill/>
-          </a:ln>
-        </p:spPr>
-      </p:pic>
-      <p:pic>
-        <p:nvPicPr>
-          <p:cNvPr id="328" name="Google Shape;328;p31" descr="image.png"/>
-          <p:cNvPicPr preferRelativeResize="0"/>
-          <p:nvPr/>
-        </p:nvPicPr>
-        <p:blipFill rotWithShape="1">
-          <a:blip r:embed="rId8">
-            <a:alphaModFix/>
-          </a:blip>
-          <a:srcRect/>
-          <a:stretch/>
-        </p:blipFill>
-        <p:spPr>
-          <a:xfrm>
-            <a:off x="5867400" y="2709862"/>
-            <a:ext cx="457200" cy="457200"/>
-          </a:xfrm>
-          <a:prstGeom prst="rect">
-            <a:avLst/>
-          </a:prstGeom>
-          <a:noFill/>
-          <a:ln>
-            <a:noFill/>
-          </a:ln>
-        </p:spPr>
-      </p:pic>
-      <p:pic>
-        <p:nvPicPr>
-          <p:cNvPr id="329" name="Google Shape;329;p31" descr="image.png"/>
-          <p:cNvPicPr preferRelativeResize="0"/>
-          <p:nvPr/>
-        </p:nvPicPr>
-        <p:blipFill rotWithShape="1">
-          <a:blip r:embed="rId9">
-            <a:alphaModFix/>
-          </a:blip>
-          <a:srcRect/>
-          <a:stretch/>
-        </p:blipFill>
-        <p:spPr>
-          <a:xfrm>
-            <a:off x="9677400" y="2709862"/>
-            <a:ext cx="457200" cy="457200"/>
-          </a:xfrm>
-          <a:prstGeom prst="rect">
-            <a:avLst/>
-          </a:prstGeom>
-          <a:noFill/>
-          <a:ln>
-            <a:noFill/>
-          </a:ln>
-        </p:spPr>
-      </p:pic>
-      <p:sp>
-        <p:nvSpPr>
-          <p:cNvPr id="330" name="Google Shape;330;p31"/>
-          <p:cNvSpPr txBox="1"/>
-          <p:nvPr/>
-        </p:nvSpPr>
-        <p:spPr>
-          <a:xfrm>
-            <a:off x="571500" y="571500"/>
-            <a:ext cx="11601450" cy="461665"/>
-          </a:xfrm>
-          <a:prstGeom prst="rect">
-            <a:avLst/>
-          </a:prstGeom>
-          <a:noFill/>
-          <a:ln>
-            <a:noFill/>
-          </a:ln>
-        </p:spPr>
-        <p:txBody>
-          <a:bodyPr spcFirstLastPara="1" wrap="square" lIns="0" tIns="0" rIns="0" bIns="0" anchor="t" anchorCtr="0">
-            <a:spAutoFit/>
-          </a:bodyPr>
-          <a:lstStyle/>
-          <a:p>
-            <a:pPr marL="0" marR="0" lvl="0" indent="0" algn="l" rtl="0">
-              <a:spcBef>
-                <a:spcPts val="0"/>
-              </a:spcBef>
-              <a:spcAft>
-                <a:spcPts val="0"/>
-              </a:spcAft>
-              <a:buNone/>
-            </a:pPr>
-            <a:r>
-              <a:rPr lang="en-US" sz="3000" b="0" i="0" u="none" strike="noStrike" cap="none" dirty="0">
-                <a:solidFill>
-                  <a:srgbClr val="06B6D4"/>
-                </a:solidFill>
-                <a:latin typeface="Poppins"/>
-                <a:ea typeface="Poppins"/>
-                <a:cs typeface="Poppins"/>
-                <a:sym typeface="Poppins"/>
-              </a:rPr>
-              <a:t>Real life example</a:t>
-            </a:r>
-            <a:endParaRPr dirty="0"/>
-          </a:p>
-        </p:txBody>
-      </p:sp>
-    </p:spTree>
   </p:cSld>
   <p:clrMapOvr>
     <a:masterClrMapping/>
